--- a/.agents/skills/presentation-writing/assets/editorial-presentation-template.pptx
+++ b/.agents/skills/presentation-writing/assets/editorial-presentation-template.pptx
@@ -2,17 +2,17 @@
 <file path=ppt/presentation.xml><?xml version="1.0" encoding="utf-8"?>
 <p:presentation xmlns:p="http://schemas.openxmlformats.org/presentationml/2006/main">
   <p:sldMasterIdLst>
-    <p:sldMasterId xmlns:r="http://schemas.openxmlformats.org/officeDocument/2006/relationships" id="2147483648" r:id="Rfeae7a6932204da8"/>
+    <p:sldMasterId xmlns:r="http://schemas.openxmlformats.org/officeDocument/2006/relationships" id="2147483648" r:id="R524489bbdd764d6d"/>
   </p:sldMasterIdLst>
   <p:notesMasterIdLst>
-    <p:notesMasterId xmlns:r="http://schemas.openxmlformats.org/officeDocument/2006/relationships" r:id="R5143a90b87e54581"/>
+    <p:notesMasterId xmlns:r="http://schemas.openxmlformats.org/officeDocument/2006/relationships" r:id="R73cdaeb6bacc4053"/>
   </p:notesMasterIdLst>
   <p:sldIdLst>
-    <p:sldId xmlns:r="http://schemas.openxmlformats.org/officeDocument/2006/relationships" id="256" r:id="R90438b6e300144c1"/>
-    <p:sldId xmlns:r="http://schemas.openxmlformats.org/officeDocument/2006/relationships" id="257" r:id="Rde4ed9e34a3941f6"/>
-    <p:sldId xmlns:r="http://schemas.openxmlformats.org/officeDocument/2006/relationships" id="258" r:id="Rddd5bce9f75f495b"/>
-    <p:sldId xmlns:r="http://schemas.openxmlformats.org/officeDocument/2006/relationships" id="259" r:id="R2fad3638c60d4dae"/>
-    <p:sldId xmlns:r="http://schemas.openxmlformats.org/officeDocument/2006/relationships" id="260" r:id="Rd75c173ecfbf4707"/>
+    <p:sldId xmlns:r="http://schemas.openxmlformats.org/officeDocument/2006/relationships" id="256" r:id="Rfd5c1c06b554451b"/>
+    <p:sldId xmlns:r="http://schemas.openxmlformats.org/officeDocument/2006/relationships" id="257" r:id="R6ef1c8126e1a47ce"/>
+    <p:sldId xmlns:r="http://schemas.openxmlformats.org/officeDocument/2006/relationships" id="258" r:id="Rbdb4f5e28e2447fd"/>
+    <p:sldId xmlns:r="http://schemas.openxmlformats.org/officeDocument/2006/relationships" id="259" r:id="R35006bdc4bb5415c"/>
+    <p:sldId xmlns:r="http://schemas.openxmlformats.org/officeDocument/2006/relationships" id="260" r:id="R7a74a065b8424071"/>
   </p:sldIdLst>
   <p:sldSz cx="15240000" cy="8572500"/>
   <p:notesSz cx="6858000" cy="9144000"/>
@@ -844,7 +844,7 @@
   </p:cSld>
   <p:clrMap bg1="lt1" tx1="dk1" bg2="lt2" tx2="dk2" accent1="accent1" accent2="accent2" accent3="accent3" accent4="accent4" accent5="accent5" accent6="accent6" hlink="hlink" folHlink="folHlink"/>
   <p:sldLayoutIdLst>
-    <p:sldLayoutId xmlns:r="http://schemas.openxmlformats.org/officeDocument/2006/relationships" id="2147483649" r:id="Rcc8fc4b2eabd4415"/>
+    <p:sldLayoutId xmlns:r="http://schemas.openxmlformats.org/officeDocument/2006/relationships" id="2147483649" r:id="R3c04ae6b96c94bc1"/>
   </p:sldLayoutIdLst>
   <p:txStyles>
     <p:titleStyle>
@@ -1395,7 +1395,7 @@
           <p:cNvPr id="5" name="image-placeholder-opening">
             <a:extLst xmlns:a="http://schemas.openxmlformats.org/drawingml/2006/main">
               <a:ext uri="{FF2B5EF4-FFF2-40B4-BE49-F238E27FC236}">
-                <a16:creationId xmlns:a16="http://schemas.microsoft.com/office/drawing/2014/main" id="{4A142D94-1030-49FF-B532-8BB3C23F81DF}"/>
+                <a16:creationId xmlns:a16="http://schemas.microsoft.com/office/drawing/2014/main" id="{80DE6072-F494-4C00-ABA5-5156F17D6633}"/>
               </a:ext>
             </a:extLst>
           </p:cNvPr>
@@ -1428,7 +1428,7 @@
           <p:cNvPr id="2" name="image-placeholder-opening-label">
             <a:extLst xmlns:a="http://schemas.openxmlformats.org/drawingml/2006/main">
               <a:ext uri="{FF2B5EF4-FFF2-40B4-BE49-F238E27FC236}">
-                <a16:creationId xmlns:a16="http://schemas.microsoft.com/office/drawing/2014/main" id="{6B85D1DE-28F7-4A73-8BA7-19460EE31AE7}"/>
+                <a16:creationId xmlns:a16="http://schemas.microsoft.com/office/drawing/2014/main" id="{8391EC55-D497-4DA7-A8C9-07D7065E802A}"/>
               </a:ext>
             </a:extLst>
           </p:cNvPr>
@@ -1478,7 +1478,7 @@
           <p:cNvPr id="3" name="opening-title">
             <a:extLst xmlns:a="http://schemas.openxmlformats.org/drawingml/2006/main">
               <a:ext uri="{FF2B5EF4-FFF2-40B4-BE49-F238E27FC236}">
-                <a16:creationId xmlns:a16="http://schemas.microsoft.com/office/drawing/2014/main" id="{6B92C416-9EC0-4CED-934F-D3A3058086A5}"/>
+                <a16:creationId xmlns:a16="http://schemas.microsoft.com/office/drawing/2014/main" id="{BEA2F6C1-E074-4DB0-B104-242FD67E3EC8}"/>
               </a:ext>
             </a:extLst>
           </p:cNvPr>
@@ -1545,7 +1545,7 @@
           <p:cNvPr id="4" name="opening-body">
             <a:extLst xmlns:a="http://schemas.openxmlformats.org/drawingml/2006/main">
               <a:ext uri="{FF2B5EF4-FFF2-40B4-BE49-F238E27FC236}">
-                <a16:creationId xmlns:a16="http://schemas.microsoft.com/office/drawing/2014/main" id="{C061EB00-1144-4DB1-AC73-B33CFAB8521B}"/>
+                <a16:creationId xmlns:a16="http://schemas.microsoft.com/office/drawing/2014/main" id="{8AF89D06-2E92-4315-8AA0-F30934EE4EBD}"/>
               </a:ext>
             </a:extLst>
           </p:cNvPr>
@@ -1593,7 +1593,7 @@
     </p:spTree>
     <p:extLst>
       <p:ext uri="{BB962C8B-B14F-4D97-AF65-F5344CB8AC3E}">
-        <p14:creationId xmlns:p14="http://schemas.microsoft.com/office/powerpoint/2010/main" val="613760288"/>
+        <p14:creationId xmlns:p14="http://schemas.microsoft.com/office/powerpoint/2010/main" val="778654568"/>
       </p:ext>
     </p:extLst>
   </p:cSld>
@@ -1624,7 +1624,7 @@
           <p:cNvPr id="6" name="text-image-title">
             <a:extLst xmlns:a="http://schemas.openxmlformats.org/drawingml/2006/main">
               <a:ext uri="{FF2B5EF4-FFF2-40B4-BE49-F238E27FC236}">
-                <a16:creationId xmlns:a16="http://schemas.microsoft.com/office/drawing/2014/main" id="{AAA25A23-8F7C-4C28-B784-30A258685AED}"/>
+                <a16:creationId xmlns:a16="http://schemas.microsoft.com/office/drawing/2014/main" id="{77A75CD9-1F30-4BFF-8B6D-F96955498DB1}"/>
               </a:ext>
             </a:extLst>
           </p:cNvPr>
@@ -1691,7 +1691,7 @@
           <p:cNvPr id="2" name="text-image-body">
             <a:extLst xmlns:a="http://schemas.openxmlformats.org/drawingml/2006/main">
               <a:ext uri="{FF2B5EF4-FFF2-40B4-BE49-F238E27FC236}">
-                <a16:creationId xmlns:a16="http://schemas.microsoft.com/office/drawing/2014/main" id="{62AC02C7-C621-466E-98CA-1B79C8AEF9C8}"/>
+                <a16:creationId xmlns:a16="http://schemas.microsoft.com/office/drawing/2014/main" id="{B98E5E72-EC45-4A6D-A66B-2390A889D432}"/>
               </a:ext>
             </a:extLst>
           </p:cNvPr>
@@ -1780,7 +1780,7 @@
           <p:cNvPr id="3" name="image-placeholder-text-image">
             <a:extLst xmlns:a="http://schemas.openxmlformats.org/drawingml/2006/main">
               <a:ext uri="{FF2B5EF4-FFF2-40B4-BE49-F238E27FC236}">
-                <a16:creationId xmlns:a16="http://schemas.microsoft.com/office/drawing/2014/main" id="{DC682DC3-2953-4476-9CAC-F06283F7EF9D}"/>
+                <a16:creationId xmlns:a16="http://schemas.microsoft.com/office/drawing/2014/main" id="{5C5699F8-599A-4328-B2C6-7E3B9A8C1A10}"/>
               </a:ext>
             </a:extLst>
           </p:cNvPr>
@@ -1813,7 +1813,7 @@
           <p:cNvPr id="4" name="image-placeholder-text-image-label">
             <a:extLst xmlns:a="http://schemas.openxmlformats.org/drawingml/2006/main">
               <a:ext uri="{FF2B5EF4-FFF2-40B4-BE49-F238E27FC236}">
-                <a16:creationId xmlns:a16="http://schemas.microsoft.com/office/drawing/2014/main" id="{AC125B5D-5704-43B5-A28B-EC28E7BB0DC1}"/>
+                <a16:creationId xmlns:a16="http://schemas.microsoft.com/office/drawing/2014/main" id="{4399F813-B614-4A7B-8517-BCF8D86C8BEB}"/>
               </a:ext>
             </a:extLst>
           </p:cNvPr>
@@ -1863,7 +1863,7 @@
           <p:cNvPr id="5" name="source-line">
             <a:extLst xmlns:a="http://schemas.openxmlformats.org/drawingml/2006/main">
               <a:ext uri="{FF2B5EF4-FFF2-40B4-BE49-F238E27FC236}">
-                <a16:creationId xmlns:a16="http://schemas.microsoft.com/office/drawing/2014/main" id="{7D23B7FF-C27C-4410-9986-D7933D1B8269}"/>
+                <a16:creationId xmlns:a16="http://schemas.microsoft.com/office/drawing/2014/main" id="{A6E50583-48AF-42B8-BF7D-5B590FC5B253}"/>
               </a:ext>
             </a:extLst>
           </p:cNvPr>
@@ -1911,7 +1911,7 @@
     </p:spTree>
     <p:extLst>
       <p:ext uri="{BB962C8B-B14F-4D97-AF65-F5344CB8AC3E}">
-        <p14:creationId xmlns:p14="http://schemas.microsoft.com/office/powerpoint/2010/main" val="1303850270"/>
+        <p14:creationId xmlns:p14="http://schemas.microsoft.com/office/powerpoint/2010/main" val="139566606"/>
       </p:ext>
     </p:extLst>
   </p:cSld>
@@ -1942,7 +1942,7 @@
           <p:cNvPr id="6" name="image-placeholder-image-text">
             <a:extLst xmlns:a="http://schemas.openxmlformats.org/drawingml/2006/main">
               <a:ext uri="{FF2B5EF4-FFF2-40B4-BE49-F238E27FC236}">
-                <a16:creationId xmlns:a16="http://schemas.microsoft.com/office/drawing/2014/main" id="{30E82EE5-5A55-4C42-9B12-C1867BBE4723}"/>
+                <a16:creationId xmlns:a16="http://schemas.microsoft.com/office/drawing/2014/main" id="{B143B0DC-AEAC-4FF3-8A5F-64469D06845E}"/>
               </a:ext>
             </a:extLst>
           </p:cNvPr>
@@ -1975,7 +1975,7 @@
           <p:cNvPr id="2" name="image-placeholder-image-text-label">
             <a:extLst xmlns:a="http://schemas.openxmlformats.org/drawingml/2006/main">
               <a:ext uri="{FF2B5EF4-FFF2-40B4-BE49-F238E27FC236}">
-                <a16:creationId xmlns:a16="http://schemas.microsoft.com/office/drawing/2014/main" id="{C474DD5E-3F91-4DE6-9287-205EF9EC7BE9}"/>
+                <a16:creationId xmlns:a16="http://schemas.microsoft.com/office/drawing/2014/main" id="{C9F7BB6B-5A6E-4D02-9E12-DE0586EAA308}"/>
               </a:ext>
             </a:extLst>
           </p:cNvPr>
@@ -2025,7 +2025,7 @@
           <p:cNvPr id="3" name="image-text-title">
             <a:extLst xmlns:a="http://schemas.openxmlformats.org/drawingml/2006/main">
               <a:ext uri="{FF2B5EF4-FFF2-40B4-BE49-F238E27FC236}">
-                <a16:creationId xmlns:a16="http://schemas.microsoft.com/office/drawing/2014/main" id="{35BF4BB0-F959-4DAE-8AFC-92596F08A4A1}"/>
+                <a16:creationId xmlns:a16="http://schemas.microsoft.com/office/drawing/2014/main" id="{21099E8F-B773-4012-A592-5F7C210DB093}"/>
               </a:ext>
             </a:extLst>
           </p:cNvPr>
@@ -2092,7 +2092,7 @@
           <p:cNvPr id="4" name="image-text-body">
             <a:extLst xmlns:a="http://schemas.openxmlformats.org/drawingml/2006/main">
               <a:ext uri="{FF2B5EF4-FFF2-40B4-BE49-F238E27FC236}">
-                <a16:creationId xmlns:a16="http://schemas.microsoft.com/office/drawing/2014/main" id="{E27F7B35-9037-484A-A568-25238E82C3B2}"/>
+                <a16:creationId xmlns:a16="http://schemas.microsoft.com/office/drawing/2014/main" id="{C6C529AD-F3B7-4752-A3FE-CFB618639BAD}"/>
               </a:ext>
             </a:extLst>
           </p:cNvPr>
@@ -2198,7 +2198,7 @@
           <p:cNvPr id="5" name="source-line">
             <a:extLst xmlns:a="http://schemas.openxmlformats.org/drawingml/2006/main">
               <a:ext uri="{FF2B5EF4-FFF2-40B4-BE49-F238E27FC236}">
-                <a16:creationId xmlns:a16="http://schemas.microsoft.com/office/drawing/2014/main" id="{880D11D1-E597-4C4E-80E4-F9EAA45118D6}"/>
+                <a16:creationId xmlns:a16="http://schemas.microsoft.com/office/drawing/2014/main" id="{F3E19FC2-8758-4042-B0AC-16E982609C79}"/>
               </a:ext>
             </a:extLst>
           </p:cNvPr>
@@ -2246,7 +2246,7 @@
     </p:spTree>
     <p:extLst>
       <p:ext uri="{BB962C8B-B14F-4D97-AF65-F5344CB8AC3E}">
-        <p14:creationId xmlns:p14="http://schemas.microsoft.com/office/powerpoint/2010/main" val="1977502521"/>
+        <p14:creationId xmlns:p14="http://schemas.microsoft.com/office/powerpoint/2010/main" val="1238870239"/>
       </p:ext>
     </p:extLst>
   </p:cSld>
@@ -2277,7 +2277,7 @@
           <p:cNvPr id="5" name="quote-text">
             <a:extLst xmlns:a="http://schemas.openxmlformats.org/drawingml/2006/main">
               <a:ext uri="{FF2B5EF4-FFF2-40B4-BE49-F238E27FC236}">
-                <a16:creationId xmlns:a16="http://schemas.microsoft.com/office/drawing/2014/main" id="{04D0F9A3-0E74-4613-A563-79623B51B389}"/>
+                <a16:creationId xmlns:a16="http://schemas.microsoft.com/office/drawing/2014/main" id="{F98E9EF9-2C72-491F-93FF-1CF35BE2EE8D}"/>
               </a:ext>
             </a:extLst>
           </p:cNvPr>
@@ -2344,7 +2344,7 @@
           <p:cNvPr id="2" name="image-placeholder-quote">
             <a:extLst xmlns:a="http://schemas.openxmlformats.org/drawingml/2006/main">
               <a:ext uri="{FF2B5EF4-FFF2-40B4-BE49-F238E27FC236}">
-                <a16:creationId xmlns:a16="http://schemas.microsoft.com/office/drawing/2014/main" id="{1120A0A0-C98F-4DFF-B215-27286D4190ED}"/>
+                <a16:creationId xmlns:a16="http://schemas.microsoft.com/office/drawing/2014/main" id="{A31099DC-C13B-4F81-AB9D-B10E6DBC79CA}"/>
               </a:ext>
             </a:extLst>
           </p:cNvPr>
@@ -2377,7 +2377,7 @@
           <p:cNvPr id="3" name="image-placeholder-quote-label">
             <a:extLst xmlns:a="http://schemas.openxmlformats.org/drawingml/2006/main">
               <a:ext uri="{FF2B5EF4-FFF2-40B4-BE49-F238E27FC236}">
-                <a16:creationId xmlns:a16="http://schemas.microsoft.com/office/drawing/2014/main" id="{F828741C-F6DB-4E87-BEE8-43B5C4EED349}"/>
+                <a16:creationId xmlns:a16="http://schemas.microsoft.com/office/drawing/2014/main" id="{09160B45-90D2-4A0C-B9D7-F550717D8E6B}"/>
               </a:ext>
             </a:extLst>
           </p:cNvPr>
@@ -2427,7 +2427,7 @@
           <p:cNvPr id="4" name="source-line">
             <a:extLst xmlns:a="http://schemas.openxmlformats.org/drawingml/2006/main">
               <a:ext uri="{FF2B5EF4-FFF2-40B4-BE49-F238E27FC236}">
-                <a16:creationId xmlns:a16="http://schemas.microsoft.com/office/drawing/2014/main" id="{4D01C044-BDC5-44DB-8B74-848019DA4F9D}"/>
+                <a16:creationId xmlns:a16="http://schemas.microsoft.com/office/drawing/2014/main" id="{66D583E5-7591-417B-AA77-C2EF5AF4E069}"/>
               </a:ext>
             </a:extLst>
           </p:cNvPr>
@@ -2475,7 +2475,7 @@
     </p:spTree>
     <p:extLst>
       <p:ext uri="{BB962C8B-B14F-4D97-AF65-F5344CB8AC3E}">
-        <p14:creationId xmlns:p14="http://schemas.microsoft.com/office/powerpoint/2010/main" val="1200892671"/>
+        <p14:creationId xmlns:p14="http://schemas.microsoft.com/office/powerpoint/2010/main" val="147211154"/>
       </p:ext>
     </p:extLst>
   </p:cSld>
@@ -2506,7 +2506,7 @@
           <p:cNvPr id="3" name="close-title">
             <a:extLst xmlns:a="http://schemas.openxmlformats.org/drawingml/2006/main">
               <a:ext uri="{FF2B5EF4-FFF2-40B4-BE49-F238E27FC236}">
-                <a16:creationId xmlns:a16="http://schemas.microsoft.com/office/drawing/2014/main" id="{2EC3186B-5A9A-4297-9705-72FF66672681}"/>
+                <a16:creationId xmlns:a16="http://schemas.microsoft.com/office/drawing/2014/main" id="{A65CEFBF-CF27-41D5-B8C0-C47468078D89}"/>
               </a:ext>
             </a:extLst>
           </p:cNvPr>
@@ -2573,7 +2573,7 @@
           <p:cNvPr id="2" name="close-body">
             <a:extLst xmlns:a="http://schemas.openxmlformats.org/drawingml/2006/main">
               <a:ext uri="{FF2B5EF4-FFF2-40B4-BE49-F238E27FC236}">
-                <a16:creationId xmlns:a16="http://schemas.microsoft.com/office/drawing/2014/main" id="{BF23285A-7B13-4D05-AD39-9C3840A75D94}"/>
+                <a16:creationId xmlns:a16="http://schemas.microsoft.com/office/drawing/2014/main" id="{744BBBD8-FC78-4FAD-BD81-B01522577425}"/>
               </a:ext>
             </a:extLst>
           </p:cNvPr>
@@ -2638,7 +2638,7 @@
     </p:spTree>
     <p:extLst>
       <p:ext uri="{BB962C8B-B14F-4D97-AF65-F5344CB8AC3E}">
-        <p14:creationId xmlns:p14="http://schemas.microsoft.com/office/powerpoint/2010/main" val="99974767"/>
+        <p14:creationId xmlns:p14="http://schemas.microsoft.com/office/powerpoint/2010/main" val="1894527331"/>
       </p:ext>
     </p:extLst>
   </p:cSld>

--- a/.agents/skills/presentation-writing/assets/editorial-presentation-template.pptx
+++ b/.agents/skills/presentation-writing/assets/editorial-presentation-template.pptx
@@ -2,17 +2,17 @@
 <file path=ppt/presentation.xml><?xml version="1.0" encoding="utf-8"?>
 <p:presentation xmlns:p="http://schemas.openxmlformats.org/presentationml/2006/main">
   <p:sldMasterIdLst>
-    <p:sldMasterId xmlns:r="http://schemas.openxmlformats.org/officeDocument/2006/relationships" id="2147483648" r:id="R524489bbdd764d6d"/>
+    <p:sldMasterId xmlns:r="http://schemas.openxmlformats.org/officeDocument/2006/relationships" id="2147483648" r:id="Rd076af2aa61a4700"/>
   </p:sldMasterIdLst>
   <p:notesMasterIdLst>
-    <p:notesMasterId xmlns:r="http://schemas.openxmlformats.org/officeDocument/2006/relationships" r:id="R73cdaeb6bacc4053"/>
+    <p:notesMasterId xmlns:r="http://schemas.openxmlformats.org/officeDocument/2006/relationships" r:id="Reb5bc9b636fb40ef"/>
   </p:notesMasterIdLst>
   <p:sldIdLst>
-    <p:sldId xmlns:r="http://schemas.openxmlformats.org/officeDocument/2006/relationships" id="256" r:id="Rfd5c1c06b554451b"/>
-    <p:sldId xmlns:r="http://schemas.openxmlformats.org/officeDocument/2006/relationships" id="257" r:id="R6ef1c8126e1a47ce"/>
-    <p:sldId xmlns:r="http://schemas.openxmlformats.org/officeDocument/2006/relationships" id="258" r:id="Rbdb4f5e28e2447fd"/>
-    <p:sldId xmlns:r="http://schemas.openxmlformats.org/officeDocument/2006/relationships" id="259" r:id="R35006bdc4bb5415c"/>
-    <p:sldId xmlns:r="http://schemas.openxmlformats.org/officeDocument/2006/relationships" id="260" r:id="R7a74a065b8424071"/>
+    <p:sldId xmlns:r="http://schemas.openxmlformats.org/officeDocument/2006/relationships" id="256" r:id="R34db0b90f05245df"/>
+    <p:sldId xmlns:r="http://schemas.openxmlformats.org/officeDocument/2006/relationships" id="257" r:id="Rfcd1d45210a34a41"/>
+    <p:sldId xmlns:r="http://schemas.openxmlformats.org/officeDocument/2006/relationships" id="258" r:id="R5a5f7a9ffa114ff3"/>
+    <p:sldId xmlns:r="http://schemas.openxmlformats.org/officeDocument/2006/relationships" id="259" r:id="R3d99435367f64068"/>
+    <p:sldId xmlns:r="http://schemas.openxmlformats.org/officeDocument/2006/relationships" id="260" r:id="R3ceb181667ba4165"/>
   </p:sldIdLst>
   <p:sldSz cx="15240000" cy="8572500"/>
   <p:notesSz cx="6858000" cy="9144000"/>
@@ -844,7 +844,7 @@
   </p:cSld>
   <p:clrMap bg1="lt1" tx1="dk1" bg2="lt2" tx2="dk2" accent1="accent1" accent2="accent2" accent3="accent3" accent4="accent4" accent5="accent5" accent6="accent6" hlink="hlink" folHlink="folHlink"/>
   <p:sldLayoutIdLst>
-    <p:sldLayoutId xmlns:r="http://schemas.openxmlformats.org/officeDocument/2006/relationships" id="2147483649" r:id="R3c04ae6b96c94bc1"/>
+    <p:sldLayoutId xmlns:r="http://schemas.openxmlformats.org/officeDocument/2006/relationships" id="2147483649" r:id="Rb17c29a4e4c6434d"/>
   </p:sldLayoutIdLst>
   <p:txStyles>
     <p:titleStyle>
@@ -1395,7 +1395,7 @@
           <p:cNvPr id="5" name="image-placeholder-opening">
             <a:extLst xmlns:a="http://schemas.openxmlformats.org/drawingml/2006/main">
               <a:ext uri="{FF2B5EF4-FFF2-40B4-BE49-F238E27FC236}">
-                <a16:creationId xmlns:a16="http://schemas.microsoft.com/office/drawing/2014/main" id="{80DE6072-F494-4C00-ABA5-5156F17D6633}"/>
+                <a16:creationId xmlns:a16="http://schemas.microsoft.com/office/drawing/2014/main" id="{9A3C3709-DF34-420D-945B-013E8B433137}"/>
               </a:ext>
             </a:extLst>
           </p:cNvPr>
@@ -1428,7 +1428,7 @@
           <p:cNvPr id="2" name="image-placeholder-opening-label">
             <a:extLst xmlns:a="http://schemas.openxmlformats.org/drawingml/2006/main">
               <a:ext uri="{FF2B5EF4-FFF2-40B4-BE49-F238E27FC236}">
-                <a16:creationId xmlns:a16="http://schemas.microsoft.com/office/drawing/2014/main" id="{8391EC55-D497-4DA7-A8C9-07D7065E802A}"/>
+                <a16:creationId xmlns:a16="http://schemas.microsoft.com/office/drawing/2014/main" id="{BB59E90D-64F9-4142-B891-46EB3CC8AEC9}"/>
               </a:ext>
             </a:extLst>
           </p:cNvPr>
@@ -1460,6 +1460,9 @@
                 <a:solidFill>
                   <a:srgbClr val="555555"/>
                 </a:solidFill>
+                <a:latin typeface="Pretendard"/>
+                <a:ea typeface="Pretendard"/>
+                <a:cs typeface="Pretendard"/>
               </a:defRPr>
             </a:pPr>
             <a:r>
@@ -1467,6 +1470,9 @@
                 <a:solidFill>
                   <a:srgbClr val="555555"/>
                 </a:solidFill>
+                <a:latin typeface="Pretendard"/>
+                <a:ea typeface="Pretendard"/>
+                <a:cs typeface="Pretendard"/>
               </a:rPr>
               <a:t>사진: 인물·현장·물건 중 하나 · 세로</a:t>
             </a:r>
@@ -1478,7 +1484,7 @@
           <p:cNvPr id="3" name="opening-title">
             <a:extLst xmlns:a="http://schemas.openxmlformats.org/drawingml/2006/main">
               <a:ext uri="{FF2B5EF4-FFF2-40B4-BE49-F238E27FC236}">
-                <a16:creationId xmlns:a16="http://schemas.microsoft.com/office/drawing/2014/main" id="{BEA2F6C1-E074-4DB0-B104-242FD67E3EC8}"/>
+                <a16:creationId xmlns:a16="http://schemas.microsoft.com/office/drawing/2014/main" id="{16F9DC67-3C9C-4435-AF43-F92CCE2B89C5}"/>
               </a:ext>
             </a:extLst>
           </p:cNvPr>
@@ -1510,6 +1516,9 @@
                 <a:solidFill>
                   <a:srgbClr val="111111"/>
                 </a:solidFill>
+                <a:latin typeface="Pretendard"/>
+                <a:ea typeface="Pretendard"/>
+                <a:cs typeface="Pretendard"/>
               </a:defRPr>
             </a:pPr>
             <a:r>
@@ -1517,6 +1526,9 @@
                 <a:solidFill>
                   <a:srgbClr val="111111"/>
                 </a:solidFill>
+                <a:latin typeface="Pretendard"/>
+                <a:ea typeface="Pretendard"/>
+                <a:cs typeface="Pretendard"/>
               </a:rPr>
               <a:t>제목을 한 문장으로</a:t>
             </a:r>
@@ -1527,6 +1539,9 @@
                 <a:solidFill>
                   <a:srgbClr val="111111"/>
                 </a:solidFill>
+                <a:latin typeface="Pretendard"/>
+                <a:ea typeface="Pretendard"/>
+                <a:cs typeface="Pretendard"/>
               </a:defRPr>
             </a:pPr>
             <a:r>
@@ -1534,6 +1549,9 @@
                 <a:solidFill>
                   <a:srgbClr val="111111"/>
                 </a:solidFill>
+                <a:latin typeface="Pretendard"/>
+                <a:ea typeface="Pretendard"/>
+                <a:cs typeface="Pretendard"/>
               </a:rPr>
               <a:t>말합니다</a:t>
             </a:r>
@@ -1545,7 +1563,7 @@
           <p:cNvPr id="4" name="opening-body">
             <a:extLst xmlns:a="http://schemas.openxmlformats.org/drawingml/2006/main">
               <a:ext uri="{FF2B5EF4-FFF2-40B4-BE49-F238E27FC236}">
-                <a16:creationId xmlns:a16="http://schemas.microsoft.com/office/drawing/2014/main" id="{8AF89D06-2E92-4315-8AA0-F30934EE4EBD}"/>
+                <a16:creationId xmlns:a16="http://schemas.microsoft.com/office/drawing/2014/main" id="{994969ED-F5C6-40CB-BC7C-DE9F4523FA8C}"/>
               </a:ext>
             </a:extLst>
           </p:cNvPr>
@@ -1577,6 +1595,9 @@
                 <a:solidFill>
                   <a:srgbClr val="3D3D3D"/>
                 </a:solidFill>
+                <a:latin typeface="Pretendard"/>
+                <a:ea typeface="Pretendard"/>
+                <a:cs typeface="Pretendard"/>
               </a:defRPr>
             </a:pPr>
             <a:r>
@@ -1584,6 +1605,9 @@
                 <a:solidFill>
                   <a:srgbClr val="3D3D3D"/>
                 </a:solidFill>
+                <a:latin typeface="Pretendard"/>
+                <a:ea typeface="Pretendard"/>
+                <a:cs typeface="Pretendard"/>
               </a:rPr>
               <a:t>발표가 끝난 뒤 청중이 기억할 핵심을 짧게 적습니다.</a:t>
             </a:r>
@@ -1593,7 +1617,7 @@
     </p:spTree>
     <p:extLst>
       <p:ext uri="{BB962C8B-B14F-4D97-AF65-F5344CB8AC3E}">
-        <p14:creationId xmlns:p14="http://schemas.microsoft.com/office/powerpoint/2010/main" val="778654568"/>
+        <p14:creationId xmlns:p14="http://schemas.microsoft.com/office/powerpoint/2010/main" val="1046490327"/>
       </p:ext>
     </p:extLst>
   </p:cSld>
@@ -1624,7 +1648,7 @@
           <p:cNvPr id="6" name="text-image-title">
             <a:extLst xmlns:a="http://schemas.openxmlformats.org/drawingml/2006/main">
               <a:ext uri="{FF2B5EF4-FFF2-40B4-BE49-F238E27FC236}">
-                <a16:creationId xmlns:a16="http://schemas.microsoft.com/office/drawing/2014/main" id="{77A75CD9-1F30-4BFF-8B6D-F96955498DB1}"/>
+                <a16:creationId xmlns:a16="http://schemas.microsoft.com/office/drawing/2014/main" id="{FDCF6A2D-7475-4ACE-9C25-64D74D7992B2}"/>
               </a:ext>
             </a:extLst>
           </p:cNvPr>
@@ -1656,6 +1680,9 @@
                 <a:solidFill>
                   <a:srgbClr val="111111"/>
                 </a:solidFill>
+                <a:latin typeface="Pretendard"/>
+                <a:ea typeface="Pretendard"/>
+                <a:cs typeface="Pretendard"/>
               </a:defRPr>
             </a:pPr>
             <a:r>
@@ -1663,6 +1690,9 @@
                 <a:solidFill>
                   <a:srgbClr val="111111"/>
                 </a:solidFill>
+                <a:latin typeface="Pretendard"/>
+                <a:ea typeface="Pretendard"/>
+                <a:cs typeface="Pretendard"/>
               </a:rPr>
               <a:t>설명은 먼저,</a:t>
             </a:r>
@@ -1673,6 +1703,9 @@
                 <a:solidFill>
                   <a:srgbClr val="111111"/>
                 </a:solidFill>
+                <a:latin typeface="Pretendard"/>
+                <a:ea typeface="Pretendard"/>
+                <a:cs typeface="Pretendard"/>
               </a:defRPr>
             </a:pPr>
             <a:r>
@@ -1680,6 +1713,9 @@
                 <a:solidFill>
                   <a:srgbClr val="111111"/>
                 </a:solidFill>
+                <a:latin typeface="Pretendard"/>
+                <a:ea typeface="Pretendard"/>
+                <a:cs typeface="Pretendard"/>
               </a:rPr>
               <a:t>사진은 그다음 보게 합니다</a:t>
             </a:r>
@@ -1691,7 +1727,7 @@
           <p:cNvPr id="2" name="text-image-body">
             <a:extLst xmlns:a="http://schemas.openxmlformats.org/drawingml/2006/main">
               <a:ext uri="{FF2B5EF4-FFF2-40B4-BE49-F238E27FC236}">
-                <a16:creationId xmlns:a16="http://schemas.microsoft.com/office/drawing/2014/main" id="{B98E5E72-EC45-4A6D-A66B-2390A889D432}"/>
+                <a16:creationId xmlns:a16="http://schemas.microsoft.com/office/drawing/2014/main" id="{7FBE995E-2FD4-4306-92F5-D0A0BD5EF706}"/>
               </a:ext>
             </a:extLst>
           </p:cNvPr>
@@ -1723,6 +1759,9 @@
                 <a:solidFill>
                   <a:srgbClr val="333333"/>
                 </a:solidFill>
+                <a:latin typeface="Pretendard"/>
+                <a:ea typeface="Pretendard"/>
+                <a:cs typeface="Pretendard"/>
               </a:defRPr>
             </a:pPr>
             <a:r>
@@ -1730,6 +1769,9 @@
                 <a:solidFill>
                   <a:srgbClr val="333333"/>
                 </a:solidFill>
+                <a:latin typeface="Pretendard"/>
+                <a:ea typeface="Pretendard"/>
+                <a:cs typeface="Pretendard"/>
               </a:rPr>
               <a:t>맥락과 근거를 두세 문장으로 정리합니다.</a:t>
             </a:r>
@@ -1740,6 +1782,9 @@
                 <a:solidFill>
                   <a:srgbClr val="333333"/>
                 </a:solidFill>
+                <a:latin typeface="Pretendard"/>
+                <a:ea typeface="Pretendard"/>
+                <a:cs typeface="Pretendard"/>
               </a:defRPr>
             </a:pPr>
             <a:r>
@@ -1747,6 +1792,9 @@
                 <a:solidFill>
                   <a:srgbClr val="333333"/>
                 </a:solidFill>
+                <a:latin typeface="Pretendard"/>
+                <a:ea typeface="Pretendard"/>
+                <a:cs typeface="Pretendard"/>
               </a:rPr>
               <a:t>길어지면 다음 슬라이드로 넘깁니다.</a:t>
             </a:r>
@@ -1762,6 +1810,9 @@
                 <a:solidFill>
                   <a:srgbClr val="333333"/>
                 </a:solidFill>
+                <a:latin typeface="Pretendard"/>
+                <a:ea typeface="Pretendard"/>
+                <a:cs typeface="Pretendard"/>
               </a:defRPr>
             </a:pPr>
             <a:r>
@@ -1769,6 +1820,9 @@
                 <a:solidFill>
                   <a:srgbClr val="333333"/>
                 </a:solidFill>
+                <a:latin typeface="Pretendard"/>
+                <a:ea typeface="Pretendard"/>
+                <a:cs typeface="Pretendard"/>
               </a:rPr>
               <a:t>강조할 한 문장만 굵은 검정 밑줄로 처리합니다.</a:t>
             </a:r>
@@ -1780,7 +1834,7 @@
           <p:cNvPr id="3" name="image-placeholder-text-image">
             <a:extLst xmlns:a="http://schemas.openxmlformats.org/drawingml/2006/main">
               <a:ext uri="{FF2B5EF4-FFF2-40B4-BE49-F238E27FC236}">
-                <a16:creationId xmlns:a16="http://schemas.microsoft.com/office/drawing/2014/main" id="{5C5699F8-599A-4328-B2C6-7E3B9A8C1A10}"/>
+                <a16:creationId xmlns:a16="http://schemas.microsoft.com/office/drawing/2014/main" id="{CDC0686A-1EE2-48AB-A0E8-6A0B21AA1F57}"/>
               </a:ext>
             </a:extLst>
           </p:cNvPr>
@@ -1813,7 +1867,7 @@
           <p:cNvPr id="4" name="image-placeholder-text-image-label">
             <a:extLst xmlns:a="http://schemas.openxmlformats.org/drawingml/2006/main">
               <a:ext uri="{FF2B5EF4-FFF2-40B4-BE49-F238E27FC236}">
-                <a16:creationId xmlns:a16="http://schemas.microsoft.com/office/drawing/2014/main" id="{4399F813-B614-4A7B-8517-BCF8D86C8BEB}"/>
+                <a16:creationId xmlns:a16="http://schemas.microsoft.com/office/drawing/2014/main" id="{52E22398-DA67-4066-93A5-5056F5C9C2B5}"/>
               </a:ext>
             </a:extLst>
           </p:cNvPr>
@@ -1845,6 +1899,9 @@
                 <a:solidFill>
                   <a:srgbClr val="555555"/>
                 </a:solidFill>
+                <a:latin typeface="Pretendard"/>
+                <a:ea typeface="Pretendard"/>
+                <a:cs typeface="Pretendard"/>
               </a:defRPr>
             </a:pPr>
             <a:r>
@@ -1852,6 +1909,9 @@
                 <a:solidFill>
                   <a:srgbClr val="555555"/>
                 </a:solidFill>
+                <a:latin typeface="Pretendard"/>
+                <a:ea typeface="Pretendard"/>
+                <a:cs typeface="Pretendard"/>
               </a:rPr>
               <a:t>사진: 맥락을 보여주는 현장 · 가로</a:t>
             </a:r>
@@ -1863,7 +1923,7 @@
           <p:cNvPr id="5" name="source-line">
             <a:extLst xmlns:a="http://schemas.openxmlformats.org/drawingml/2006/main">
               <a:ext uri="{FF2B5EF4-FFF2-40B4-BE49-F238E27FC236}">
-                <a16:creationId xmlns:a16="http://schemas.microsoft.com/office/drawing/2014/main" id="{A6E50583-48AF-42B8-BF7D-5B590FC5B253}"/>
+                <a16:creationId xmlns:a16="http://schemas.microsoft.com/office/drawing/2014/main" id="{DBB874F2-83F5-4008-A3C5-7C0D293D5772}"/>
               </a:ext>
             </a:extLst>
           </p:cNvPr>
@@ -1895,6 +1955,9 @@
                 <a:solidFill>
                   <a:srgbClr val="666666"/>
                 </a:solidFill>
+                <a:latin typeface="Pretendard"/>
+                <a:ea typeface="Pretendard"/>
+                <a:cs typeface="Pretendard"/>
               </a:defRPr>
             </a:pPr>
             <a:r>
@@ -1902,6 +1965,9 @@
                 <a:solidFill>
                   <a:srgbClr val="666666"/>
                 </a:solidFill>
+                <a:latin typeface="Pretendard"/>
+                <a:ea typeface="Pretendard"/>
+                <a:cs typeface="Pretendard"/>
               </a:rPr>
               <a:t>출처: 최종 자료에서 확인</a:t>
             </a:r>
@@ -1911,7 +1977,7 @@
     </p:spTree>
     <p:extLst>
       <p:ext uri="{BB962C8B-B14F-4D97-AF65-F5344CB8AC3E}">
-        <p14:creationId xmlns:p14="http://schemas.microsoft.com/office/powerpoint/2010/main" val="139566606"/>
+        <p14:creationId xmlns:p14="http://schemas.microsoft.com/office/powerpoint/2010/main" val="1676862379"/>
       </p:ext>
     </p:extLst>
   </p:cSld>
@@ -1942,7 +2008,7 @@
           <p:cNvPr id="6" name="image-placeholder-image-text">
             <a:extLst xmlns:a="http://schemas.openxmlformats.org/drawingml/2006/main">
               <a:ext uri="{FF2B5EF4-FFF2-40B4-BE49-F238E27FC236}">
-                <a16:creationId xmlns:a16="http://schemas.microsoft.com/office/drawing/2014/main" id="{B143B0DC-AEAC-4FF3-8A5F-64469D06845E}"/>
+                <a16:creationId xmlns:a16="http://schemas.microsoft.com/office/drawing/2014/main" id="{F8FFE437-A2C8-40A6-86E2-ADDE43D4E826}"/>
               </a:ext>
             </a:extLst>
           </p:cNvPr>
@@ -1975,7 +2041,7 @@
           <p:cNvPr id="2" name="image-placeholder-image-text-label">
             <a:extLst xmlns:a="http://schemas.openxmlformats.org/drawingml/2006/main">
               <a:ext uri="{FF2B5EF4-FFF2-40B4-BE49-F238E27FC236}">
-                <a16:creationId xmlns:a16="http://schemas.microsoft.com/office/drawing/2014/main" id="{C9F7BB6B-5A6E-4D02-9E12-DE0586EAA308}"/>
+                <a16:creationId xmlns:a16="http://schemas.microsoft.com/office/drawing/2014/main" id="{826873E8-55F1-4BE9-9F88-32C61E561739}"/>
               </a:ext>
             </a:extLst>
           </p:cNvPr>
@@ -2007,6 +2073,9 @@
                 <a:solidFill>
                   <a:srgbClr val="555555"/>
                 </a:solidFill>
+                <a:latin typeface="Pretendard"/>
+                <a:ea typeface="Pretendard"/>
+                <a:cs typeface="Pretendard"/>
               </a:defRPr>
             </a:pPr>
             <a:r>
@@ -2014,6 +2083,9 @@
                 <a:solidFill>
                   <a:srgbClr val="555555"/>
                 </a:solidFill>
+                <a:latin typeface="Pretendard"/>
+                <a:ea typeface="Pretendard"/>
+                <a:cs typeface="Pretendard"/>
               </a:rPr>
               <a:t>사진: 감정을 만드는 인물 또는 현장 · 세로</a:t>
             </a:r>
@@ -2025,7 +2097,7 @@
           <p:cNvPr id="3" name="image-text-title">
             <a:extLst xmlns:a="http://schemas.openxmlformats.org/drawingml/2006/main">
               <a:ext uri="{FF2B5EF4-FFF2-40B4-BE49-F238E27FC236}">
-                <a16:creationId xmlns:a16="http://schemas.microsoft.com/office/drawing/2014/main" id="{21099E8F-B773-4012-A592-5F7C210DB093}"/>
+                <a16:creationId xmlns:a16="http://schemas.microsoft.com/office/drawing/2014/main" id="{A59070D6-465A-453E-92C8-C7299902DBA5}"/>
               </a:ext>
             </a:extLst>
           </p:cNvPr>
@@ -2057,6 +2129,9 @@
                 <a:solidFill>
                   <a:srgbClr val="111111"/>
                 </a:solidFill>
+                <a:latin typeface="Pretendard"/>
+                <a:ea typeface="Pretendard"/>
+                <a:cs typeface="Pretendard"/>
               </a:defRPr>
             </a:pPr>
             <a:r>
@@ -2064,6 +2139,9 @@
                 <a:solidFill>
                   <a:srgbClr val="111111"/>
                 </a:solidFill>
+                <a:latin typeface="Pretendard"/>
+                <a:ea typeface="Pretendard"/>
+                <a:cs typeface="Pretendard"/>
               </a:rPr>
               <a:t>사진이 먼저,</a:t>
             </a:r>
@@ -2074,6 +2152,9 @@
                 <a:solidFill>
                   <a:srgbClr val="111111"/>
                 </a:solidFill>
+                <a:latin typeface="Pretendard"/>
+                <a:ea typeface="Pretendard"/>
+                <a:cs typeface="Pretendard"/>
               </a:defRPr>
             </a:pPr>
             <a:r>
@@ -2081,6 +2162,9 @@
                 <a:solidFill>
                   <a:srgbClr val="111111"/>
                 </a:solidFill>
+                <a:latin typeface="Pretendard"/>
+                <a:ea typeface="Pretendard"/>
+                <a:cs typeface="Pretendard"/>
               </a:rPr>
               <a:t>맥락은 그다음 옵니다</a:t>
             </a:r>
@@ -2092,7 +2176,7 @@
           <p:cNvPr id="4" name="image-text-body">
             <a:extLst xmlns:a="http://schemas.openxmlformats.org/drawingml/2006/main">
               <a:ext uri="{FF2B5EF4-FFF2-40B4-BE49-F238E27FC236}">
-                <a16:creationId xmlns:a16="http://schemas.microsoft.com/office/drawing/2014/main" id="{C6C529AD-F3B7-4752-A3FE-CFB618639BAD}"/>
+                <a16:creationId xmlns:a16="http://schemas.microsoft.com/office/drawing/2014/main" id="{493651B2-7A91-49A2-9884-6C9C5D2AC589}"/>
               </a:ext>
             </a:extLst>
           </p:cNvPr>
@@ -2124,6 +2208,9 @@
                 <a:solidFill>
                   <a:srgbClr val="333333"/>
                 </a:solidFill>
+                <a:latin typeface="Pretendard"/>
+                <a:ea typeface="Pretendard"/>
+                <a:cs typeface="Pretendard"/>
               </a:defRPr>
             </a:pPr>
             <a:r>
@@ -2131,6 +2218,9 @@
                 <a:solidFill>
                   <a:srgbClr val="333333"/>
                 </a:solidFill>
+                <a:latin typeface="Pretendard"/>
+                <a:ea typeface="Pretendard"/>
+                <a:cs typeface="Pretendard"/>
               </a:rPr>
               <a:t>사진이 만든 첫 인상을</a:t>
             </a:r>
@@ -2141,6 +2231,9 @@
                 <a:solidFill>
                   <a:srgbClr val="333333"/>
                 </a:solidFill>
+                <a:latin typeface="Pretendard"/>
+                <a:ea typeface="Pretendard"/>
+                <a:cs typeface="Pretendard"/>
               </a:defRPr>
             </a:pPr>
             <a:r>
@@ -2148,6 +2241,9 @@
                 <a:solidFill>
                   <a:srgbClr val="333333"/>
                 </a:solidFill>
+                <a:latin typeface="Pretendard"/>
+                <a:ea typeface="Pretendard"/>
+                <a:cs typeface="Pretendard"/>
               </a:rPr>
               <a:t>짧은 설명으로 해석합니다.</a:t>
             </a:r>
@@ -2163,6 +2259,9 @@
                 <a:solidFill>
                   <a:srgbClr val="333333"/>
                 </a:solidFill>
+                <a:latin typeface="Pretendard"/>
+                <a:ea typeface="Pretendard"/>
+                <a:cs typeface="Pretendard"/>
               </a:defRPr>
             </a:pPr>
             <a:r>
@@ -2170,6 +2269,9 @@
                 <a:solidFill>
                   <a:srgbClr val="333333"/>
                 </a:solidFill>
+                <a:latin typeface="Pretendard"/>
+                <a:ea typeface="Pretendard"/>
+                <a:cs typeface="Pretendard"/>
               </a:rPr>
               <a:t>한 슬라이드에는 한 가지</a:t>
             </a:r>
@@ -2180,6 +2282,9 @@
                 <a:solidFill>
                   <a:srgbClr val="333333"/>
                 </a:solidFill>
+                <a:latin typeface="Pretendard"/>
+                <a:ea typeface="Pretendard"/>
+                <a:cs typeface="Pretendard"/>
               </a:defRPr>
             </a:pPr>
             <a:r>
@@ -2187,6 +2292,9 @@
                 <a:solidFill>
                   <a:srgbClr val="333333"/>
                 </a:solidFill>
+                <a:latin typeface="Pretendard"/>
+                <a:ea typeface="Pretendard"/>
+                <a:cs typeface="Pretendard"/>
               </a:rPr>
               <a:t>판단만 남깁니다.</a:t>
             </a:r>
@@ -2198,7 +2306,7 @@
           <p:cNvPr id="5" name="source-line">
             <a:extLst xmlns:a="http://schemas.openxmlformats.org/drawingml/2006/main">
               <a:ext uri="{FF2B5EF4-FFF2-40B4-BE49-F238E27FC236}">
-                <a16:creationId xmlns:a16="http://schemas.microsoft.com/office/drawing/2014/main" id="{F3E19FC2-8758-4042-B0AC-16E982609C79}"/>
+                <a16:creationId xmlns:a16="http://schemas.microsoft.com/office/drawing/2014/main" id="{DE715B30-29D5-4D36-9001-4440DB0CD0BF}"/>
               </a:ext>
             </a:extLst>
           </p:cNvPr>
@@ -2230,6 +2338,9 @@
                 <a:solidFill>
                   <a:srgbClr val="666666"/>
                 </a:solidFill>
+                <a:latin typeface="Pretendard"/>
+                <a:ea typeface="Pretendard"/>
+                <a:cs typeface="Pretendard"/>
               </a:defRPr>
             </a:pPr>
             <a:r>
@@ -2237,6 +2348,9 @@
                 <a:solidFill>
                   <a:srgbClr val="666666"/>
                 </a:solidFill>
+                <a:latin typeface="Pretendard"/>
+                <a:ea typeface="Pretendard"/>
+                <a:cs typeface="Pretendard"/>
               </a:rPr>
               <a:t>출처: 최종 자료에서 확인</a:t>
             </a:r>
@@ -2246,7 +2360,7 @@
     </p:spTree>
     <p:extLst>
       <p:ext uri="{BB962C8B-B14F-4D97-AF65-F5344CB8AC3E}">
-        <p14:creationId xmlns:p14="http://schemas.microsoft.com/office/powerpoint/2010/main" val="1238870239"/>
+        <p14:creationId xmlns:p14="http://schemas.microsoft.com/office/powerpoint/2010/main" val="1484250379"/>
       </p:ext>
     </p:extLst>
   </p:cSld>
@@ -2277,7 +2391,7 @@
           <p:cNvPr id="5" name="quote-text">
             <a:extLst xmlns:a="http://schemas.openxmlformats.org/drawingml/2006/main">
               <a:ext uri="{FF2B5EF4-FFF2-40B4-BE49-F238E27FC236}">
-                <a16:creationId xmlns:a16="http://schemas.microsoft.com/office/drawing/2014/main" id="{F98E9EF9-2C72-491F-93FF-1CF35BE2EE8D}"/>
+                <a16:creationId xmlns:a16="http://schemas.microsoft.com/office/drawing/2014/main" id="{384DF323-6F1E-4AEB-8A35-4B00D629A662}"/>
               </a:ext>
             </a:extLst>
           </p:cNvPr>
@@ -2309,6 +2423,9 @@
                 <a:solidFill>
                   <a:srgbClr val="111111"/>
                 </a:solidFill>
+                <a:latin typeface="Pretendard"/>
+                <a:ea typeface="Pretendard"/>
+                <a:cs typeface="Pretendard"/>
               </a:defRPr>
             </a:pPr>
             <a:r>
@@ -2316,6 +2433,9 @@
                 <a:solidFill>
                   <a:srgbClr val="111111"/>
                 </a:solidFill>
+                <a:latin typeface="Pretendard"/>
+                <a:ea typeface="Pretendard"/>
+                <a:cs typeface="Pretendard"/>
               </a:rPr>
               <a:t>“한 문장 인용은</a:t>
             </a:r>
@@ -2326,6 +2446,9 @@
                 <a:solidFill>
                   <a:srgbClr val="111111"/>
                 </a:solidFill>
+                <a:latin typeface="Pretendard"/>
+                <a:ea typeface="Pretendard"/>
+                <a:cs typeface="Pretendard"/>
               </a:defRPr>
             </a:pPr>
             <a:r>
@@ -2333,6 +2456,9 @@
                 <a:solidFill>
                   <a:srgbClr val="111111"/>
                 </a:solidFill>
+                <a:latin typeface="Pretendard"/>
+                <a:ea typeface="Pretendard"/>
+                <a:cs typeface="Pretendard"/>
               </a:rPr>
               <a:t>문제를 선명하게 만듭니다.”</a:t>
             </a:r>
@@ -2344,7 +2470,7 @@
           <p:cNvPr id="2" name="image-placeholder-quote">
             <a:extLst xmlns:a="http://schemas.openxmlformats.org/drawingml/2006/main">
               <a:ext uri="{FF2B5EF4-FFF2-40B4-BE49-F238E27FC236}">
-                <a16:creationId xmlns:a16="http://schemas.microsoft.com/office/drawing/2014/main" id="{A31099DC-C13B-4F81-AB9D-B10E6DBC79CA}"/>
+                <a16:creationId xmlns:a16="http://schemas.microsoft.com/office/drawing/2014/main" id="{3CA9F3ED-AE17-4448-B4E8-C9776FF30798}"/>
               </a:ext>
             </a:extLst>
           </p:cNvPr>
@@ -2377,7 +2503,7 @@
           <p:cNvPr id="3" name="image-placeholder-quote-label">
             <a:extLst xmlns:a="http://schemas.openxmlformats.org/drawingml/2006/main">
               <a:ext uri="{FF2B5EF4-FFF2-40B4-BE49-F238E27FC236}">
-                <a16:creationId xmlns:a16="http://schemas.microsoft.com/office/drawing/2014/main" id="{09160B45-90D2-4A0C-B9D7-F550717D8E6B}"/>
+                <a16:creationId xmlns:a16="http://schemas.microsoft.com/office/drawing/2014/main" id="{245959F4-22DC-4BAF-B92D-122C607DAC0A}"/>
               </a:ext>
             </a:extLst>
           </p:cNvPr>
@@ -2409,6 +2535,9 @@
                 <a:solidFill>
                   <a:srgbClr val="555555"/>
                 </a:solidFill>
+                <a:latin typeface="Pretendard"/>
+                <a:ea typeface="Pretendard"/>
+                <a:cs typeface="Pretendard"/>
               </a:defRPr>
             </a:pPr>
             <a:r>
@@ -2416,6 +2545,9 @@
                 <a:solidFill>
                   <a:srgbClr val="555555"/>
                 </a:solidFill>
+                <a:latin typeface="Pretendard"/>
+                <a:ea typeface="Pretendard"/>
+                <a:cs typeface="Pretendard"/>
               </a:rPr>
               <a:t>사진: 발언 중인 인물 · 가로</a:t>
             </a:r>
@@ -2427,7 +2559,7 @@
           <p:cNvPr id="4" name="source-line">
             <a:extLst xmlns:a="http://schemas.openxmlformats.org/drawingml/2006/main">
               <a:ext uri="{FF2B5EF4-FFF2-40B4-BE49-F238E27FC236}">
-                <a16:creationId xmlns:a16="http://schemas.microsoft.com/office/drawing/2014/main" id="{66D583E5-7591-417B-AA77-C2EF5AF4E069}"/>
+                <a16:creationId xmlns:a16="http://schemas.microsoft.com/office/drawing/2014/main" id="{E9AEEC0F-D2E6-41D1-8DE5-3E9D6BD3E024}"/>
               </a:ext>
             </a:extLst>
           </p:cNvPr>
@@ -2459,6 +2591,9 @@
                 <a:solidFill>
                   <a:srgbClr val="666666"/>
                 </a:solidFill>
+                <a:latin typeface="Pretendard"/>
+                <a:ea typeface="Pretendard"/>
+                <a:cs typeface="Pretendard"/>
               </a:defRPr>
             </a:pPr>
             <a:r>
@@ -2466,6 +2601,9 @@
                 <a:solidFill>
                   <a:srgbClr val="666666"/>
                 </a:solidFill>
+                <a:latin typeface="Pretendard"/>
+                <a:ea typeface="Pretendard"/>
+                <a:cs typeface="Pretendard"/>
               </a:rPr>
               <a:t>인용 출처: 최종 자료에서 확인</a:t>
             </a:r>
@@ -2475,7 +2613,7 @@
     </p:spTree>
     <p:extLst>
       <p:ext uri="{BB962C8B-B14F-4D97-AF65-F5344CB8AC3E}">
-        <p14:creationId xmlns:p14="http://schemas.microsoft.com/office/powerpoint/2010/main" val="147211154"/>
+        <p14:creationId xmlns:p14="http://schemas.microsoft.com/office/powerpoint/2010/main" val="1344894422"/>
       </p:ext>
     </p:extLst>
   </p:cSld>
@@ -2506,7 +2644,7 @@
           <p:cNvPr id="3" name="close-title">
             <a:extLst xmlns:a="http://schemas.openxmlformats.org/drawingml/2006/main">
               <a:ext uri="{FF2B5EF4-FFF2-40B4-BE49-F238E27FC236}">
-                <a16:creationId xmlns:a16="http://schemas.microsoft.com/office/drawing/2014/main" id="{A65CEFBF-CF27-41D5-B8C0-C47468078D89}"/>
+                <a16:creationId xmlns:a16="http://schemas.microsoft.com/office/drawing/2014/main" id="{61D8D7C3-CF11-420E-8DD7-E08363296EDC}"/>
               </a:ext>
             </a:extLst>
           </p:cNvPr>
@@ -2538,6 +2676,9 @@
                 <a:solidFill>
                   <a:srgbClr val="111111"/>
                 </a:solidFill>
+                <a:latin typeface="Pretendard"/>
+                <a:ea typeface="Pretendard"/>
+                <a:cs typeface="Pretendard"/>
               </a:defRPr>
             </a:pPr>
             <a:r>
@@ -2545,6 +2686,9 @@
                 <a:solidFill>
                   <a:srgbClr val="111111"/>
                 </a:solidFill>
+                <a:latin typeface="Pretendard"/>
+                <a:ea typeface="Pretendard"/>
+                <a:cs typeface="Pretendard"/>
               </a:rPr>
               <a:t>좋은 마무리는</a:t>
             </a:r>
@@ -2555,6 +2699,9 @@
                 <a:solidFill>
                   <a:srgbClr val="111111"/>
                 </a:solidFill>
+                <a:latin typeface="Pretendard"/>
+                <a:ea typeface="Pretendard"/>
+                <a:cs typeface="Pretendard"/>
               </a:defRPr>
             </a:pPr>
             <a:r>
@@ -2562,6 +2709,9 @@
                 <a:solidFill>
                   <a:srgbClr val="111111"/>
                 </a:solidFill>
+                <a:latin typeface="Pretendard"/>
+                <a:ea typeface="Pretendard"/>
+                <a:cs typeface="Pretendard"/>
               </a:rPr>
               <a:t>다음 행동을 남깁니다</a:t>
             </a:r>
@@ -2573,7 +2723,7 @@
           <p:cNvPr id="2" name="close-body">
             <a:extLst xmlns:a="http://schemas.openxmlformats.org/drawingml/2006/main">
               <a:ext uri="{FF2B5EF4-FFF2-40B4-BE49-F238E27FC236}">
-                <a16:creationId xmlns:a16="http://schemas.microsoft.com/office/drawing/2014/main" id="{744BBBD8-FC78-4FAD-BD81-B01522577425}"/>
+                <a16:creationId xmlns:a16="http://schemas.microsoft.com/office/drawing/2014/main" id="{1E9C8728-AB34-4A32-8ABB-B8219547CAE2}"/>
               </a:ext>
             </a:extLst>
           </p:cNvPr>
@@ -2605,6 +2755,9 @@
                 <a:solidFill>
                   <a:srgbClr val="333333"/>
                 </a:solidFill>
+                <a:latin typeface="Pretendard"/>
+                <a:ea typeface="Pretendard"/>
+                <a:cs typeface="Pretendard"/>
               </a:defRPr>
             </a:pPr>
             <a:r>
@@ -2612,6 +2765,9 @@
                 <a:solidFill>
                   <a:srgbClr val="333333"/>
                 </a:solidFill>
+                <a:latin typeface="Pretendard"/>
+                <a:ea typeface="Pretendard"/>
+                <a:cs typeface="Pretendard"/>
               </a:rPr>
               <a:t>결론 한 문장과,</a:t>
             </a:r>
@@ -2622,6 +2778,9 @@
                 <a:solidFill>
                   <a:srgbClr val="333333"/>
                 </a:solidFill>
+                <a:latin typeface="Pretendard"/>
+                <a:ea typeface="Pretendard"/>
+                <a:cs typeface="Pretendard"/>
               </a:defRPr>
             </a:pPr>
             <a:r>
@@ -2629,6 +2788,9 @@
                 <a:solidFill>
                   <a:srgbClr val="333333"/>
                 </a:solidFill>
+                <a:latin typeface="Pretendard"/>
+                <a:ea typeface="Pretendard"/>
+                <a:cs typeface="Pretendard"/>
               </a:rPr>
               <a:t>청중이 기억하거나 결정할 한 가지를 적습니다.</a:t>
             </a:r>
@@ -2638,7 +2800,7 @@
     </p:spTree>
     <p:extLst>
       <p:ext uri="{BB962C8B-B14F-4D97-AF65-F5344CB8AC3E}">
-        <p14:creationId xmlns:p14="http://schemas.microsoft.com/office/powerpoint/2010/main" val="1894527331"/>
+        <p14:creationId xmlns:p14="http://schemas.microsoft.com/office/powerpoint/2010/main" val="1576972714"/>
       </p:ext>
     </p:extLst>
   </p:cSld>
@@ -2688,14 +2850,14 @@
     </a:clrScheme>
     <a:fontScheme name="Office">
       <a:majorFont>
-        <a:latin typeface="Calibri Light"/>
-        <a:ea typeface="Calibri Light"/>
-        <a:cs typeface="Calibri Light"/>
+        <a:latin typeface="Pretendard"/>
+        <a:ea typeface="Pretendard"/>
+        <a:cs typeface="Pretendard"/>
       </a:majorFont>
       <a:minorFont>
-        <a:latin typeface="Calibri"/>
-        <a:ea typeface="Calibri"/>
-        <a:cs typeface="Calibri"/>
+        <a:latin typeface="Pretendard"/>
+        <a:ea typeface="Pretendard"/>
+        <a:cs typeface="Pretendard"/>
       </a:minorFont>
     </a:fontScheme>
     <a:fmtScheme name="ChatGPT">
